--- a/generated/Tier 1 Broker Scorecards/Specialty Coverage Insurance Agency, LLC_Broker_Scorecard.pptx
+++ b/generated/Tier 1 Broker Scorecards/Specialty Coverage Insurance Agency, LLC_Broker_Scorecard.pptx
@@ -3357,7 +3357,7 @@
                         <a:rPr sz="800">
                           <a:latin typeface="Segoe UI"/>
                         </a:rPr>
-                        <a:t>$3,498,766.90 / $3,272,734.29 / $1,037,281.37</a:t>
+                        <a:t>$3,498,766.90 / $3,271,370.48 / $1,035,917.56</a:t>
                       </a:r>
                     </a:p>
                   </a:txBody>
@@ -3394,7 +3394,7 @@
                         <a:rPr sz="900">
                           <a:latin typeface="Segoe UI"/>
                         </a:rPr>
-                        <a:t>Tier 1  |  11.13% / 15.00%</a:t>
+                        <a:t>Tier 1  |  10.68% / 15.00%</a:t>
                       </a:r>
                     </a:p>
                   </a:txBody>
@@ -3431,7 +3431,7 @@
                         <a:rPr sz="900">
                           <a:latin typeface="Segoe UI"/>
                         </a:rPr>
-                        <a:t>$4,898,273.66  (21.2% achieved)</a:t>
+                        <a:t>$4,898,273.66  (21.1% achieved)</a:t>
                       </a:r>
                     </a:p>
                   </a:txBody>
@@ -3653,7 +3653,7 @@
                         <a:rPr sz="900">
                           <a:latin typeface="Segoe UI"/>
                         </a:rPr>
-                        <a:t>Fleet Subs: 16  |  Binds: 2</a:t>
+                        <a:t>Fleet Subs: 16  |  Binds: 1</a:t>
                       </a:r>
                     </a:p>
                   </a:txBody>
@@ -3690,7 +3690,7 @@
                         <a:rPr sz="900">
                           <a:latin typeface="Segoe UI"/>
                         </a:rPr>
-                        <a:t>Fleet Bound Premium: $139,320.62</a:t>
+                        <a:t>Fleet Bound Premium: $77,292.96</a:t>
                       </a:r>
                     </a:p>
                   </a:txBody>
@@ -3727,7 +3727,7 @@
                         <a:rPr sz="900">
                           <a:latin typeface="Segoe UI"/>
                         </a:rPr>
-                        <a:t>Fleet Book %: 13.4%</a:t>
+                        <a:t>Fleet Book %: 7.5%</a:t>
                       </a:r>
                     </a:p>
                   </a:txBody>
@@ -3766,7 +3766,7 @@
                         <a:rPr sz="900">
                           <a:latin typeface="Segoe UI"/>
                         </a:rPr>
-                        <a:t>Non-Fleet Subs: 496  |  Binds: 55</a:t>
+                        <a:t>Non-Fleet Subs: 499  |  Binds: 54</a:t>
                       </a:r>
                     </a:p>
                   </a:txBody>
@@ -3803,7 +3803,7 @@
                         <a:rPr sz="900">
                           <a:latin typeface="Segoe UI"/>
                         </a:rPr>
-                        <a:t>Non-Fleet Bound Premium: $897,960.75</a:t>
+                        <a:t>Non-Fleet Bound Premium: $958,624.60</a:t>
                       </a:r>
                     </a:p>
                   </a:txBody>
@@ -3840,7 +3840,7 @@
                         <a:rPr sz="900">
                           <a:latin typeface="Segoe UI"/>
                         </a:rPr>
-                        <a:t>Non-Fleet Book %: 86.6%</a:t>
+                        <a:t>Non-Fleet Book %: 92.5%</a:t>
                       </a:r>
                     </a:p>
                   </a:txBody>
@@ -4311,7 +4311,7 @@
                         <a:rPr sz="800">
                           <a:latin typeface="Segoe UI"/>
                         </a:rPr>
-                        <a:t>139</a:t>
+                        <a:t>140</a:t>
                       </a:r>
                     </a:p>
                   </a:txBody>
@@ -4428,7 +4428,7 @@
                           </a:solidFill>
                           <a:latin typeface="Segoe UI"/>
                         </a:rPr>
-                        <a:t>97</a:t>
+                        <a:t>104</a:t>
                       </a:r>
                     </a:p>
                   </a:txBody>
@@ -4581,7 +4581,7 @@
                         <a:rPr sz="800">
                           <a:latin typeface="Segoe UI"/>
                         </a:rPr>
-                        <a:t>23.0%</a:t>
+                        <a:t>23.6%</a:t>
                       </a:r>
                     </a:p>
                   </a:txBody>
@@ -4624,7 +4624,7 @@
                           </a:solidFill>
                           <a:latin typeface="Segoe UI"/>
                         </a:rPr>
-                        <a:t>17.6%</a:t>
+                        <a:t>18.2%</a:t>
                       </a:r>
                     </a:p>
                   </a:txBody>
@@ -4707,7 +4707,7 @@
                           </a:solidFill>
                           <a:latin typeface="Segoe UI"/>
                         </a:rPr>
-                        <a:t>12.4%</a:t>
+                        <a:t>13.5%</a:t>
                       </a:r>
                     </a:p>
                   </a:txBody>
@@ -4866,7 +4866,7 @@
                         <a:rPr sz="800">
                           <a:latin typeface="Segoe UI"/>
                         </a:rPr>
-                        <a:t>32</a:t>
+                        <a:t>33</a:t>
                       </a:r>
                     </a:p>
                   </a:txBody>
@@ -4906,7 +4906,7 @@
                           </a:solidFill>
                           <a:latin typeface="Segoe UI"/>
                         </a:rPr>
-                        <a:t>28</a:t>
+                        <a:t>29</a:t>
                       </a:r>
                     </a:p>
                   </a:txBody>
@@ -4983,7 +4983,7 @@
                           </a:solidFill>
                           <a:latin typeface="Segoe UI"/>
                         </a:rPr>
-                        <a:t>12</a:t>
+                        <a:t>14</a:t>
                       </a:r>
                     </a:p>
                   </a:txBody>
@@ -5262,7 +5262,7 @@
                           </a:solidFill>
                           <a:latin typeface="Segoe UI"/>
                         </a:rPr>
-                        <a:t>$111.8K</a:t>
+                        <a:t>$110.4K</a:t>
                       </a:r>
                     </a:p>
                   </a:txBody>

--- a/generated/Tier 1 Broker Scorecards/Specialty Coverage Insurance Agency, LLC_Broker_Scorecard.pptx
+++ b/generated/Tier 1 Broker Scorecards/Specialty Coverage Insurance Agency, LLC_Broker_Scorecard.pptx
@@ -3394,7 +3394,7 @@
                         <a:rPr sz="900">
                           <a:latin typeface="Segoe UI"/>
                         </a:rPr>
-                        <a:t>Tier 1  |  10.68% / 15.00%</a:t>
+                        <a:t>Tier 1  |  11.39% / 15.00%</a:t>
                       </a:r>
                     </a:p>
                   </a:txBody>
@@ -3653,7 +3653,7 @@
                         <a:rPr sz="900">
                           <a:latin typeface="Segoe UI"/>
                         </a:rPr>
-                        <a:t>Fleet Subs: 16  |  Binds: 1</a:t>
+                        <a:t>Fleet Subs: 17  |  Binds: 1</a:t>
                       </a:r>
                     </a:p>
                   </a:txBody>
@@ -3690,7 +3690,7 @@
                         <a:rPr sz="900">
                           <a:latin typeface="Segoe UI"/>
                         </a:rPr>
-                        <a:t>Fleet Bound Premium: $77,292.96</a:t>
+                        <a:t>Fleet Bound Premium: $71,368.95</a:t>
                       </a:r>
                     </a:p>
                   </a:txBody>
@@ -3727,7 +3727,7 @@
                         <a:rPr sz="900">
                           <a:latin typeface="Segoe UI"/>
                         </a:rPr>
-                        <a:t>Fleet Book %: 7.5%</a:t>
+                        <a:t>Fleet Book %: 6.9%</a:t>
                       </a:r>
                     </a:p>
                   </a:txBody>
@@ -3766,7 +3766,7 @@
                         <a:rPr sz="900">
                           <a:latin typeface="Segoe UI"/>
                         </a:rPr>
-                        <a:t>Non-Fleet Subs: 499  |  Binds: 54</a:t>
+                        <a:t>Non-Fleet Subs: 501  |  Binds: 58</a:t>
                       </a:r>
                     </a:p>
                   </a:txBody>
@@ -3803,7 +3803,7 @@
                         <a:rPr sz="900">
                           <a:latin typeface="Segoe UI"/>
                         </a:rPr>
-                        <a:t>Non-Fleet Bound Premium: $958,624.60</a:t>
+                        <a:t>Non-Fleet Bound Premium: $964,548.61</a:t>
                       </a:r>
                     </a:p>
                   </a:txBody>
@@ -3840,7 +3840,7 @@
                         <a:rPr sz="900">
                           <a:latin typeface="Segoe UI"/>
                         </a:rPr>
-                        <a:t>Non-Fleet Book %: 92.5%</a:t>
+                        <a:t>Non-Fleet Book %: 93.1%</a:t>
                       </a:r>
                     </a:p>
                   </a:txBody>
@@ -4311,7 +4311,7 @@
                         <a:rPr sz="800">
                           <a:latin typeface="Segoe UI"/>
                         </a:rPr>
-                        <a:t>140</a:t>
+                        <a:t>139</a:t>
                       </a:r>
                     </a:p>
                   </a:txBody>
@@ -4424,11 +4424,11 @@
                       <a:r>
                         <a:rPr sz="800">
                           <a:solidFill>
-                            <a:srgbClr val="DC2626"/>
+                            <a:srgbClr val="059669"/>
                           </a:solidFill>
                           <a:latin typeface="Segoe UI"/>
                         </a:rPr>
-                        <a:t>104</a:t>
+                        <a:t>108</a:t>
                       </a:r>
                     </a:p>
                   </a:txBody>
@@ -4581,7 +4581,7 @@
                         <a:rPr sz="800">
                           <a:latin typeface="Segoe UI"/>
                         </a:rPr>
-                        <a:t>23.6%</a:t>
+                        <a:t>24.5%</a:t>
                       </a:r>
                     </a:p>
                   </a:txBody>
@@ -4664,7 +4664,7 @@
                         <a:rPr sz="800">
                           <a:latin typeface="Segoe UI"/>
                         </a:rPr>
-                        <a:t>31.8%</a:t>
+                        <a:t>29.0%</a:t>
                       </a:r>
                     </a:p>
                   </a:txBody>
@@ -4707,7 +4707,7 @@
                           </a:solidFill>
                           <a:latin typeface="Segoe UI"/>
                         </a:rPr>
-                        <a:t>13.5%</a:t>
+                        <a:t>14.8%</a:t>
                       </a:r>
                     </a:p>
                   </a:txBody>
@@ -4866,7 +4866,7 @@
                         <a:rPr sz="800">
                           <a:latin typeface="Segoe UI"/>
                         </a:rPr>
-                        <a:t>33</a:t>
+                        <a:t>34</a:t>
                       </a:r>
                     </a:p>
                   </a:txBody>
@@ -4943,7 +4943,7 @@
                         <a:rPr sz="800">
                           <a:latin typeface="Segoe UI"/>
                         </a:rPr>
-                        <a:t>34</a:t>
+                        <a:t>31</a:t>
                       </a:r>
                     </a:p>
                   </a:txBody>
@@ -4983,7 +4983,7 @@
                           </a:solidFill>
                           <a:latin typeface="Segoe UI"/>
                         </a:rPr>
-                        <a:t>14</a:t>
+                        <a:t>16</a:t>
                       </a:r>
                     </a:p>
                   </a:txBody>

--- a/generated/Tier 1 Broker Scorecards/Specialty Coverage Insurance Agency, LLC_Broker_Scorecard.pptx
+++ b/generated/Tier 1 Broker Scorecards/Specialty Coverage Insurance Agency, LLC_Broker_Scorecard.pptx
@@ -3357,7 +3357,7 @@
                         <a:rPr sz="800">
                           <a:latin typeface="Segoe UI"/>
                         </a:rPr>
-                        <a:t>$3,498,766.90 / $3,271,370.48 / $1,035,917.56</a:t>
+                        <a:t>$3,498,766.90 / $3,279,889.51 / $1,044,436.59</a:t>
                       </a:r>
                     </a:p>
                   </a:txBody>
@@ -3394,7 +3394,7 @@
                         <a:rPr sz="900">
                           <a:latin typeface="Segoe UI"/>
                         </a:rPr>
-                        <a:t>Tier 1  |  11.39% / 15.00%</a:t>
+                        <a:t>Tier 1  |  11.41% / 15.00%</a:t>
                       </a:r>
                     </a:p>
                   </a:txBody>
@@ -3431,7 +3431,7 @@
                         <a:rPr sz="900">
                           <a:latin typeface="Segoe UI"/>
                         </a:rPr>
-                        <a:t>$4,898,273.66  (21.1% achieved)</a:t>
+                        <a:t>$4,898,273.66  (21.3% achieved)</a:t>
                       </a:r>
                     </a:p>
                   </a:txBody>
@@ -3690,7 +3690,7 @@
                         <a:rPr sz="900">
                           <a:latin typeface="Segoe UI"/>
                         </a:rPr>
-                        <a:t>Fleet Bound Premium: $71,368.95</a:t>
+                        <a:t>Fleet Bound Premium: $71,914.52</a:t>
                       </a:r>
                     </a:p>
                   </a:txBody>
@@ -3766,7 +3766,7 @@
                         <a:rPr sz="900">
                           <a:latin typeface="Segoe UI"/>
                         </a:rPr>
-                        <a:t>Non-Fleet Subs: 501  |  Binds: 58</a:t>
+                        <a:t>Non-Fleet Subs: 509  |  Binds: 59</a:t>
                       </a:r>
                     </a:p>
                   </a:txBody>
@@ -3803,7 +3803,7 @@
                         <a:rPr sz="900">
                           <a:latin typeface="Segoe UI"/>
                         </a:rPr>
-                        <a:t>Non-Fleet Bound Premium: $964,548.61</a:t>
+                        <a:t>Non-Fleet Bound Premium: $972,522.07</a:t>
                       </a:r>
                     </a:p>
                   </a:txBody>
@@ -4428,7 +4428,7 @@
                           </a:solidFill>
                           <a:latin typeface="Segoe UI"/>
                         </a:rPr>
-                        <a:t>108</a:t>
+                        <a:t>116</a:t>
                       </a:r>
                     </a:p>
                   </a:txBody>
@@ -4581,7 +4581,7 @@
                         <a:rPr sz="800">
                           <a:latin typeface="Segoe UI"/>
                         </a:rPr>
-                        <a:t>24.5%</a:t>
+                        <a:t>23.0%</a:t>
                       </a:r>
                     </a:p>
                   </a:txBody>
@@ -4664,7 +4664,7 @@
                         <a:rPr sz="800">
                           <a:latin typeface="Segoe UI"/>
                         </a:rPr>
-                        <a:t>29.0%</a:t>
+                        <a:t>29.9%</a:t>
                       </a:r>
                     </a:p>
                   </a:txBody>
@@ -4707,7 +4707,7 @@
                           </a:solidFill>
                           <a:latin typeface="Segoe UI"/>
                         </a:rPr>
-                        <a:t>14.8%</a:t>
+                        <a:t>14.7%</a:t>
                       </a:r>
                     </a:p>
                   </a:txBody>
@@ -4866,7 +4866,7 @@
                         <a:rPr sz="800">
                           <a:latin typeface="Segoe UI"/>
                         </a:rPr>
-                        <a:t>34</a:t>
+                        <a:t>32</a:t>
                       </a:r>
                     </a:p>
                   </a:txBody>
@@ -4943,7 +4943,7 @@
                         <a:rPr sz="800">
                           <a:latin typeface="Segoe UI"/>
                         </a:rPr>
-                        <a:t>31</a:t>
+                        <a:t>32</a:t>
                       </a:r>
                     </a:p>
                   </a:txBody>
@@ -4983,7 +4983,7 @@
                           </a:solidFill>
                           <a:latin typeface="Segoe UI"/>
                         </a:rPr>
-                        <a:t>16</a:t>
+                        <a:t>17</a:t>
                       </a:r>
                     </a:p>
                   </a:txBody>
@@ -5262,7 +5262,7 @@
                           </a:solidFill>
                           <a:latin typeface="Segoe UI"/>
                         </a:rPr>
-                        <a:t>$110.4K</a:t>
+                        <a:t>$118.9K</a:t>
                       </a:r>
                     </a:p>
                   </a:txBody>

--- a/generated/Tier 1 Broker Scorecards/Specialty Coverage Insurance Agency, LLC_Broker_Scorecard.pptx
+++ b/generated/Tier 1 Broker Scorecards/Specialty Coverage Insurance Agency, LLC_Broker_Scorecard.pptx
@@ -3394,7 +3394,7 @@
                         <a:rPr sz="900">
                           <a:latin typeface="Segoe UI"/>
                         </a:rPr>
-                        <a:t>Tier 1  |  11.41% / 15.00%</a:t>
+                        <a:t>Tier 1  |  11.36% / 15.00%</a:t>
                       </a:r>
                     </a:p>
                   </a:txBody>
@@ -3766,7 +3766,7 @@
                         <a:rPr sz="900">
                           <a:latin typeface="Segoe UI"/>
                         </a:rPr>
-                        <a:t>Non-Fleet Subs: 509  |  Binds: 59</a:t>
+                        <a:t>Non-Fleet Subs: 511  |  Binds: 59</a:t>
                       </a:r>
                     </a:p>
                   </a:txBody>
@@ -4428,7 +4428,7 @@
                           </a:solidFill>
                           <a:latin typeface="Segoe UI"/>
                         </a:rPr>
-                        <a:t>116</a:t>
+                        <a:t>119</a:t>
                       </a:r>
                     </a:p>
                   </a:txBody>
@@ -4581,7 +4581,7 @@
                         <a:rPr sz="800">
                           <a:latin typeface="Segoe UI"/>
                         </a:rPr>
-                        <a:t>23.0%</a:t>
+                        <a:t>23.7%</a:t>
                       </a:r>
                     </a:p>
                   </a:txBody>
@@ -4664,7 +4664,7 @@
                         <a:rPr sz="800">
                           <a:latin typeface="Segoe UI"/>
                         </a:rPr>
-                        <a:t>29.9%</a:t>
+                        <a:t>30.8%</a:t>
                       </a:r>
                     </a:p>
                   </a:txBody>
@@ -4707,7 +4707,7 @@
                           </a:solidFill>
                           <a:latin typeface="Segoe UI"/>
                         </a:rPr>
-                        <a:t>14.7%</a:t>
+                        <a:t>14.3%</a:t>
                       </a:r>
                     </a:p>
                   </a:txBody>
@@ -4747,7 +4747,7 @@
                         <a:rPr sz="800">
                           <a:latin typeface="Segoe UI"/>
                         </a:rPr>
-                        <a:t>25.5%</a:t>
+                        <a:t>26.2%</a:t>
                       </a:r>
                     </a:p>
                   </a:txBody>
@@ -4866,7 +4866,7 @@
                         <a:rPr sz="800">
                           <a:latin typeface="Segoe UI"/>
                         </a:rPr>
-                        <a:t>32</a:t>
+                        <a:t>33</a:t>
                       </a:r>
                     </a:p>
                   </a:txBody>
@@ -4943,7 +4943,7 @@
                         <a:rPr sz="800">
                           <a:latin typeface="Segoe UI"/>
                         </a:rPr>
-                        <a:t>32</a:t>
+                        <a:t>33</a:t>
                       </a:r>
                     </a:p>
                   </a:txBody>
@@ -5020,7 +5020,7 @@
                         <a:rPr sz="800">
                           <a:latin typeface="Segoe UI"/>
                         </a:rPr>
-                        <a:t>38</a:t>
+                        <a:t>39</a:t>
                       </a:r>
                     </a:p>
                   </a:txBody>

--- a/generated/Tier 1 Broker Scorecards/Specialty Coverage Insurance Agency, LLC_Broker_Scorecard.pptx
+++ b/generated/Tier 1 Broker Scorecards/Specialty Coverage Insurance Agency, LLC_Broker_Scorecard.pptx
@@ -3357,7 +3357,7 @@
                         <a:rPr sz="800">
                           <a:latin typeface="Segoe UI"/>
                         </a:rPr>
-                        <a:t>$3,498,766.90 / $3,279,889.51 / $1,044,436.59</a:t>
+                        <a:t>$3,498,766.90 / $3,297,960.00 / $1,062,507.08</a:t>
                       </a:r>
                     </a:p>
                   </a:txBody>
@@ -3394,7 +3394,7 @@
                         <a:rPr sz="900">
                           <a:latin typeface="Segoe UI"/>
                         </a:rPr>
-                        <a:t>Tier 1  |  11.36% / 15.00%</a:t>
+                        <a:t>Tier 1  |  11.65% / 15.00%</a:t>
                       </a:r>
                     </a:p>
                   </a:txBody>
@@ -3431,7 +3431,7 @@
                         <a:rPr sz="900">
                           <a:latin typeface="Segoe UI"/>
                         </a:rPr>
-                        <a:t>$4,898,273.66  (21.3% achieved)</a:t>
+                        <a:t>$4,898,273.66  (21.7% achieved)</a:t>
                       </a:r>
                     </a:p>
                   </a:txBody>
@@ -3690,7 +3690,7 @@
                         <a:rPr sz="900">
                           <a:latin typeface="Segoe UI"/>
                         </a:rPr>
-                        <a:t>Fleet Bound Premium: $71,914.52</a:t>
+                        <a:t>Fleet Bound Premium: $68,468.36</a:t>
                       </a:r>
                     </a:p>
                   </a:txBody>
@@ -3727,7 +3727,7 @@
                         <a:rPr sz="900">
                           <a:latin typeface="Segoe UI"/>
                         </a:rPr>
-                        <a:t>Fleet Book %: 6.9%</a:t>
+                        <a:t>Fleet Book %: 6.4%</a:t>
                       </a:r>
                     </a:p>
                   </a:txBody>
@@ -3766,7 +3766,7 @@
                         <a:rPr sz="900">
                           <a:latin typeface="Segoe UI"/>
                         </a:rPr>
-                        <a:t>Non-Fleet Subs: 511  |  Binds: 59</a:t>
+                        <a:t>Non-Fleet Subs: 515  |  Binds: 61</a:t>
                       </a:r>
                     </a:p>
                   </a:txBody>
@@ -3803,7 +3803,7 @@
                         <a:rPr sz="900">
                           <a:latin typeface="Segoe UI"/>
                         </a:rPr>
-                        <a:t>Non-Fleet Bound Premium: $972,522.07</a:t>
+                        <a:t>Non-Fleet Bound Premium: $994,038.72</a:t>
                       </a:r>
                     </a:p>
                   </a:txBody>
@@ -3840,7 +3840,7 @@
                         <a:rPr sz="900">
                           <a:latin typeface="Segoe UI"/>
                         </a:rPr>
-                        <a:t>Non-Fleet Book %: 93.1%</a:t>
+                        <a:t>Non-Fleet Book %: 93.6%</a:t>
                       </a:r>
                     </a:p>
                   </a:txBody>
@@ -4428,7 +4428,7 @@
                           </a:solidFill>
                           <a:latin typeface="Segoe UI"/>
                         </a:rPr>
-                        <a:t>119</a:t>
+                        <a:t>123</a:t>
                       </a:r>
                     </a:p>
                   </a:txBody>
@@ -4465,7 +4465,7 @@
                         <a:rPr sz="800">
                           <a:latin typeface="Segoe UI"/>
                         </a:rPr>
-                        <a:t>149</a:t>
+                        <a:t>150</a:t>
                       </a:r>
                     </a:p>
                   </a:txBody>
@@ -4581,7 +4581,7 @@
                         <a:rPr sz="800">
                           <a:latin typeface="Segoe UI"/>
                         </a:rPr>
-                        <a:t>23.7%</a:t>
+                        <a:t>23.0%</a:t>
                       </a:r>
                     </a:p>
                   </a:txBody>
@@ -4664,7 +4664,7 @@
                         <a:rPr sz="800">
                           <a:latin typeface="Segoe UI"/>
                         </a:rPr>
-                        <a:t>30.8%</a:t>
+                        <a:t>31.8%</a:t>
                       </a:r>
                     </a:p>
                   </a:txBody>
@@ -4707,7 +4707,7 @@
                           </a:solidFill>
                           <a:latin typeface="Segoe UI"/>
                         </a:rPr>
-                        <a:t>14.3%</a:t>
+                        <a:t>15.4%</a:t>
                       </a:r>
                     </a:p>
                   </a:txBody>
@@ -4747,7 +4747,7 @@
                         <a:rPr sz="800">
                           <a:latin typeface="Segoe UI"/>
                         </a:rPr>
-                        <a:t>26.2%</a:t>
+                        <a:t>25.3%</a:t>
                       </a:r>
                     </a:p>
                   </a:txBody>
@@ -4866,7 +4866,7 @@
                         <a:rPr sz="800">
                           <a:latin typeface="Segoe UI"/>
                         </a:rPr>
-                        <a:t>33</a:t>
+                        <a:t>32</a:t>
                       </a:r>
                     </a:p>
                   </a:txBody>
@@ -4943,7 +4943,7 @@
                         <a:rPr sz="800">
                           <a:latin typeface="Segoe UI"/>
                         </a:rPr>
-                        <a:t>33</a:t>
+                        <a:t>34</a:t>
                       </a:r>
                     </a:p>
                   </a:txBody>
@@ -4983,7 +4983,7 @@
                           </a:solidFill>
                           <a:latin typeface="Segoe UI"/>
                         </a:rPr>
-                        <a:t>17</a:t>
+                        <a:t>19</a:t>
                       </a:r>
                     </a:p>
                   </a:txBody>
@@ -5020,7 +5020,7 @@
                         <a:rPr sz="800">
                           <a:latin typeface="Segoe UI"/>
                         </a:rPr>
-                        <a:t>39</a:t>
+                        <a:t>38</a:t>
                       </a:r>
                     </a:p>
                   </a:txBody>
@@ -5262,7 +5262,7 @@
                           </a:solidFill>
                           <a:latin typeface="Segoe UI"/>
                         </a:rPr>
-                        <a:t>$118.9K</a:t>
+                        <a:t>$137.0K</a:t>
                       </a:r>
                     </a:p>
                   </a:txBody>

--- a/generated/Tier 1 Broker Scorecards/Specialty Coverage Insurance Agency, LLC_Broker_Scorecard.pptx
+++ b/generated/Tier 1 Broker Scorecards/Specialty Coverage Insurance Agency, LLC_Broker_Scorecard.pptx
@@ -3394,7 +3394,7 @@
                         <a:rPr sz="900">
                           <a:latin typeface="Segoe UI"/>
                         </a:rPr>
-                        <a:t>Tier 1  |  11.65% / 15.00%</a:t>
+                        <a:t>Tier 1  |  11.47% / 15.00%</a:t>
                       </a:r>
                     </a:p>
                   </a:txBody>
@@ -3690,7 +3690,7 @@
                         <a:rPr sz="900">
                           <a:latin typeface="Segoe UI"/>
                         </a:rPr>
-                        <a:t>Fleet Bound Premium: $68,468.36</a:t>
+                        <a:t>Fleet Bound Premium: $69,948.16</a:t>
                       </a:r>
                     </a:p>
                   </a:txBody>
@@ -3727,7 +3727,7 @@
                         <a:rPr sz="900">
                           <a:latin typeface="Segoe UI"/>
                         </a:rPr>
-                        <a:t>Fleet Book %: 6.4%</a:t>
+                        <a:t>Fleet Book %: 6.6%</a:t>
                       </a:r>
                     </a:p>
                   </a:txBody>
@@ -3766,7 +3766,7 @@
                         <a:rPr sz="900">
                           <a:latin typeface="Segoe UI"/>
                         </a:rPr>
-                        <a:t>Non-Fleet Subs: 515  |  Binds: 61</a:t>
+                        <a:t>Non-Fleet Subs: 515  |  Binds: 60</a:t>
                       </a:r>
                     </a:p>
                   </a:txBody>
@@ -3803,7 +3803,7 @@
                         <a:rPr sz="900">
                           <a:latin typeface="Segoe UI"/>
                         </a:rPr>
-                        <a:t>Non-Fleet Bound Premium: $994,038.72</a:t>
+                        <a:t>Non-Fleet Bound Premium: $992,558.92</a:t>
                       </a:r>
                     </a:p>
                   </a:txBody>
@@ -3840,7 +3840,7 @@
                         <a:rPr sz="900">
                           <a:latin typeface="Segoe UI"/>
                         </a:rPr>
-                        <a:t>Non-Fleet Book %: 93.6%</a:t>
+                        <a:t>Non-Fleet Book %: 93.4%</a:t>
                       </a:r>
                     </a:p>
                   </a:txBody>
@@ -4465,7 +4465,7 @@
                         <a:rPr sz="800">
                           <a:latin typeface="Segoe UI"/>
                         </a:rPr>
-                        <a:t>150</a:t>
+                        <a:t>149</a:t>
                       </a:r>
                     </a:p>
                   </a:txBody>
@@ -4581,7 +4581,7 @@
                         <a:rPr sz="800">
                           <a:latin typeface="Segoe UI"/>
                         </a:rPr>
-                        <a:t>23.0%</a:t>
+                        <a:t>24.5%</a:t>
                       </a:r>
                     </a:p>
                   </a:txBody>
@@ -4747,7 +4747,7 @@
                         <a:rPr sz="800">
                           <a:latin typeface="Segoe UI"/>
                         </a:rPr>
-                        <a:t>25.3%</a:t>
+                        <a:t>26.2%</a:t>
                       </a:r>
                     </a:p>
                   </a:txBody>
@@ -4866,7 +4866,7 @@
                         <a:rPr sz="800">
                           <a:latin typeface="Segoe UI"/>
                         </a:rPr>
-                        <a:t>32</a:t>
+                        <a:t>34</a:t>
                       </a:r>
                     </a:p>
                   </a:txBody>
@@ -5020,7 +5020,7 @@
                         <a:rPr sz="800">
                           <a:latin typeface="Segoe UI"/>
                         </a:rPr>
-                        <a:t>38</a:t>
+                        <a:t>39</a:t>
                       </a:r>
                     </a:p>
                   </a:txBody>

--- a/generated/Tier 1 Broker Scorecards/Specialty Coverage Insurance Agency, LLC_Broker_Scorecard.pptx
+++ b/generated/Tier 1 Broker Scorecards/Specialty Coverage Insurance Agency, LLC_Broker_Scorecard.pptx
@@ -4581,7 +4581,7 @@
                         <a:rPr sz="800">
                           <a:latin typeface="Segoe UI"/>
                         </a:rPr>
-                        <a:t>24.5%</a:t>
+                        <a:t>23.7%</a:t>
                       </a:r>
                     </a:p>
                   </a:txBody>
@@ -4866,7 +4866,7 @@
                         <a:rPr sz="800">
                           <a:latin typeface="Segoe UI"/>
                         </a:rPr>
-                        <a:t>34</a:t>
+                        <a:t>33</a:t>
                       </a:r>
                     </a:p>
                   </a:txBody>

--- a/generated/Tier 1 Broker Scorecards/Specialty Coverage Insurance Agency, LLC_Broker_Scorecard.pptx
+++ b/generated/Tier 1 Broker Scorecards/Specialty Coverage Insurance Agency, LLC_Broker_Scorecard.pptx
@@ -3357,7 +3357,7 @@
                         <a:rPr sz="800">
                           <a:latin typeface="Segoe UI"/>
                         </a:rPr>
-                        <a:t>$3,498,766.90 / $3,297,960.00 / $1,062,507.08</a:t>
+                        <a:t>$3,498,766.90 / $3,317,919.88 / $1,082,466.96</a:t>
                       </a:r>
                     </a:p>
                   </a:txBody>
@@ -3431,7 +3431,7 @@
                         <a:rPr sz="900">
                           <a:latin typeface="Segoe UI"/>
                         </a:rPr>
-                        <a:t>$4,898,273.66  (21.7% achieved)</a:t>
+                        <a:t>$4,898,273.66  (22.1% achieved)</a:t>
                       </a:r>
                     </a:p>
                   </a:txBody>
@@ -3690,7 +3690,7 @@
                         <a:rPr sz="900">
                           <a:latin typeface="Segoe UI"/>
                         </a:rPr>
-                        <a:t>Fleet Bound Premium: $69,948.16</a:t>
+                        <a:t>Fleet Bound Premium: $71,483.82</a:t>
                       </a:r>
                     </a:p>
                   </a:txBody>
@@ -3803,7 +3803,7 @@
                         <a:rPr sz="900">
                           <a:latin typeface="Segoe UI"/>
                         </a:rPr>
-                        <a:t>Non-Fleet Bound Premium: $992,558.92</a:t>
+                        <a:t>Non-Fleet Bound Premium: $1,010,983.14</a:t>
                       </a:r>
                     </a:p>
                   </a:txBody>
@@ -4465,7 +4465,7 @@
                         <a:rPr sz="800">
                           <a:latin typeface="Segoe UI"/>
                         </a:rPr>
-                        <a:t>149</a:t>
+                        <a:t>150</a:t>
                       </a:r>
                     </a:p>
                   </a:txBody>
@@ -4581,7 +4581,7 @@
                         <a:rPr sz="800">
                           <a:latin typeface="Segoe UI"/>
                         </a:rPr>
-                        <a:t>23.7%</a:t>
+                        <a:t>23.0%</a:t>
                       </a:r>
                     </a:p>
                   </a:txBody>
@@ -4664,7 +4664,7 @@
                         <a:rPr sz="800">
                           <a:latin typeface="Segoe UI"/>
                         </a:rPr>
-                        <a:t>31.8%</a:t>
+                        <a:t>30.8%</a:t>
                       </a:r>
                     </a:p>
                   </a:txBody>
@@ -4747,7 +4747,7 @@
                         <a:rPr sz="800">
                           <a:latin typeface="Segoe UI"/>
                         </a:rPr>
-                        <a:t>26.2%</a:t>
+                        <a:t>25.3%</a:t>
                       </a:r>
                     </a:p>
                   </a:txBody>
@@ -4866,7 +4866,7 @@
                         <a:rPr sz="800">
                           <a:latin typeface="Segoe UI"/>
                         </a:rPr>
-                        <a:t>33</a:t>
+                        <a:t>32</a:t>
                       </a:r>
                     </a:p>
                   </a:txBody>
@@ -4943,7 +4943,7 @@
                         <a:rPr sz="800">
                           <a:latin typeface="Segoe UI"/>
                         </a:rPr>
-                        <a:t>34</a:t>
+                        <a:t>33</a:t>
                       </a:r>
                     </a:p>
                   </a:txBody>
@@ -5020,7 +5020,7 @@
                         <a:rPr sz="800">
                           <a:latin typeface="Segoe UI"/>
                         </a:rPr>
-                        <a:t>39</a:t>
+                        <a:t>38</a:t>
                       </a:r>
                     </a:p>
                   </a:txBody>
@@ -5262,7 +5262,7 @@
                           </a:solidFill>
                           <a:latin typeface="Segoe UI"/>
                         </a:rPr>
-                        <a:t>$137.0K</a:t>
+                        <a:t>$157.0K</a:t>
                       </a:r>
                     </a:p>
                   </a:txBody>

--- a/generated/Tier 1 Broker Scorecards/Specialty Coverage Insurance Agency, LLC_Broker_Scorecard.pptx
+++ b/generated/Tier 1 Broker Scorecards/Specialty Coverage Insurance Agency, LLC_Broker_Scorecard.pptx
@@ -3357,7 +3357,7 @@
                         <a:rPr sz="800">
                           <a:latin typeface="Segoe UI"/>
                         </a:rPr>
-                        <a:t>$3,498,766.90 / $3,317,919.88 / $1,082,466.96</a:t>
+                        <a:t>$3,498,766.90 / $3,317,667.68 / $1,082,214.76</a:t>
                       </a:r>
                     </a:p>
                   </a:txBody>
@@ -3394,7 +3394,7 @@
                         <a:rPr sz="900">
                           <a:latin typeface="Segoe UI"/>
                         </a:rPr>
-                        <a:t>Tier 1  |  11.47% / 15.00%</a:t>
+                        <a:t>Tier 1  |  10.80% / 15.00%</a:t>
                       </a:r>
                     </a:p>
                   </a:txBody>
@@ -3690,7 +3690,7 @@
                         <a:rPr sz="900">
                           <a:latin typeface="Segoe UI"/>
                         </a:rPr>
-                        <a:t>Fleet Bound Premium: $71,483.82</a:t>
+                        <a:t>Fleet Bound Premium: $76,245.39</a:t>
                       </a:r>
                     </a:p>
                   </a:txBody>
@@ -3727,7 +3727,7 @@
                         <a:rPr sz="900">
                           <a:latin typeface="Segoe UI"/>
                         </a:rPr>
-                        <a:t>Fleet Book %: 6.6%</a:t>
+                        <a:t>Fleet Book %: 7.0%</a:t>
                       </a:r>
                     </a:p>
                   </a:txBody>
@@ -3766,7 +3766,7 @@
                         <a:rPr sz="900">
                           <a:latin typeface="Segoe UI"/>
                         </a:rPr>
-                        <a:t>Non-Fleet Subs: 515  |  Binds: 60</a:t>
+                        <a:t>Non-Fleet Subs: 520  |  Binds: 57</a:t>
                       </a:r>
                     </a:p>
                   </a:txBody>
@@ -3803,7 +3803,7 @@
                         <a:rPr sz="900">
                           <a:latin typeface="Segoe UI"/>
                         </a:rPr>
-                        <a:t>Non-Fleet Bound Premium: $1,010,983.14</a:t>
+                        <a:t>Non-Fleet Bound Premium: $1,005,969.37</a:t>
                       </a:r>
                     </a:p>
                   </a:txBody>
@@ -3840,7 +3840,7 @@
                         <a:rPr sz="900">
                           <a:latin typeface="Segoe UI"/>
                         </a:rPr>
-                        <a:t>Non-Fleet Book %: 93.4%</a:t>
+                        <a:t>Non-Fleet Book %: 93.0%</a:t>
                       </a:r>
                     </a:p>
                   </a:txBody>
@@ -4311,7 +4311,7 @@
                         <a:rPr sz="800">
                           <a:latin typeface="Segoe UI"/>
                         </a:rPr>
-                        <a:t>139</a:t>
+                        <a:t>140</a:t>
                       </a:r>
                     </a:p>
                   </a:txBody>
@@ -4428,7 +4428,7 @@
                           </a:solidFill>
                           <a:latin typeface="Segoe UI"/>
                         </a:rPr>
-                        <a:t>123</a:t>
+                        <a:t>129</a:t>
                       </a:r>
                     </a:p>
                   </a:txBody>
@@ -4581,7 +4581,7 @@
                         <a:rPr sz="800">
                           <a:latin typeface="Segoe UI"/>
                         </a:rPr>
-                        <a:t>23.0%</a:t>
+                        <a:t>25.0%</a:t>
                       </a:r>
                     </a:p>
                   </a:txBody>
@@ -4664,7 +4664,7 @@
                         <a:rPr sz="800">
                           <a:latin typeface="Segoe UI"/>
                         </a:rPr>
-                        <a:t>30.8%</a:t>
+                        <a:t>29.0%</a:t>
                       </a:r>
                     </a:p>
                   </a:txBody>
@@ -4707,7 +4707,7 @@
                           </a:solidFill>
                           <a:latin typeface="Segoe UI"/>
                         </a:rPr>
-                        <a:t>15.4%</a:t>
+                        <a:t>14.0%</a:t>
                       </a:r>
                     </a:p>
                   </a:txBody>
@@ -4866,7 +4866,7 @@
                         <a:rPr sz="800">
                           <a:latin typeface="Segoe UI"/>
                         </a:rPr>
-                        <a:t>32</a:t>
+                        <a:t>35</a:t>
                       </a:r>
                     </a:p>
                   </a:txBody>
@@ -4943,7 +4943,7 @@
                         <a:rPr sz="800">
                           <a:latin typeface="Segoe UI"/>
                         </a:rPr>
-                        <a:t>33</a:t>
+                        <a:t>31</a:t>
                       </a:r>
                     </a:p>
                   </a:txBody>
@@ -4983,7 +4983,7 @@
                           </a:solidFill>
                           <a:latin typeface="Segoe UI"/>
                         </a:rPr>
-                        <a:t>19</a:t>
+                        <a:t>18</a:t>
                       </a:r>
                     </a:p>
                   </a:txBody>
@@ -5262,7 +5262,7 @@
                           </a:solidFill>
                           <a:latin typeface="Segoe UI"/>
                         </a:rPr>
-                        <a:t>$157.0K</a:t>
+                        <a:t>$157.5K</a:t>
                       </a:r>
                     </a:p>
                   </a:txBody>

--- a/generated/Tier 1 Broker Scorecards/Specialty Coverage Insurance Agency, LLC_Broker_Scorecard.pptx
+++ b/generated/Tier 1 Broker Scorecards/Specialty Coverage Insurance Agency, LLC_Broker_Scorecard.pptx
@@ -3357,7 +3357,7 @@
                         <a:rPr sz="800">
                           <a:latin typeface="Segoe UI"/>
                         </a:rPr>
-                        <a:t>$3,498,766.90 / $3,317,667.68 / $1,082,214.76</a:t>
+                        <a:t>$3,498,766.90 / $3,317,657.13 / $1,082,204.21</a:t>
                       </a:r>
                     </a:p>
                   </a:txBody>
@@ -3394,7 +3394,7 @@
                         <a:rPr sz="900">
                           <a:latin typeface="Segoe UI"/>
                         </a:rPr>
-                        <a:t>Tier 1  |  10.80% / 15.00%</a:t>
+                        <a:t>Tier 1  |  10.72% / 15.00%</a:t>
                       </a:r>
                     </a:p>
                   </a:txBody>
@@ -3690,7 +3690,7 @@
                         <a:rPr sz="900">
                           <a:latin typeface="Segoe UI"/>
                         </a:rPr>
-                        <a:t>Fleet Bound Premium: $76,245.39</a:t>
+                        <a:t>Fleet Bound Premium: $75,386.13</a:t>
                       </a:r>
                     </a:p>
                   </a:txBody>
@@ -3766,7 +3766,7 @@
                         <a:rPr sz="900">
                           <a:latin typeface="Segoe UI"/>
                         </a:rPr>
-                        <a:t>Non-Fleet Subs: 520  |  Binds: 57</a:t>
+                        <a:t>Non-Fleet Subs: 524  |  Binds: 57</a:t>
                       </a:r>
                     </a:p>
                   </a:txBody>
@@ -3803,7 +3803,7 @@
                         <a:rPr sz="900">
                           <a:latin typeface="Segoe UI"/>
                         </a:rPr>
-                        <a:t>Non-Fleet Bound Premium: $1,005,969.37</a:t>
+                        <a:t>Non-Fleet Bound Premium: $1,006,818.08</a:t>
                       </a:r>
                     </a:p>
                   </a:txBody>
@@ -4311,7 +4311,7 @@
                         <a:rPr sz="800">
                           <a:latin typeface="Segoe UI"/>
                         </a:rPr>
-                        <a:t>140</a:t>
+                        <a:t>139</a:t>
                       </a:r>
                     </a:p>
                   </a:txBody>
@@ -4428,7 +4428,7 @@
                           </a:solidFill>
                           <a:latin typeface="Segoe UI"/>
                         </a:rPr>
-                        <a:t>129</a:t>
+                        <a:t>136</a:t>
                       </a:r>
                     </a:p>
                   </a:txBody>
@@ -4465,7 +4465,7 @@
                         <a:rPr sz="800">
                           <a:latin typeface="Segoe UI"/>
                         </a:rPr>
-                        <a:t>150</a:t>
+                        <a:t>149</a:t>
                       </a:r>
                     </a:p>
                   </a:txBody>
@@ -4581,7 +4581,7 @@
                         <a:rPr sz="800">
                           <a:latin typeface="Segoe UI"/>
                         </a:rPr>
-                        <a:t>25.0%</a:t>
+                        <a:t>23.7%</a:t>
                       </a:r>
                     </a:p>
                   </a:txBody>
@@ -4664,7 +4664,7 @@
                         <a:rPr sz="800">
                           <a:latin typeface="Segoe UI"/>
                         </a:rPr>
-                        <a:t>29.0%</a:t>
+                        <a:t>29.9%</a:t>
                       </a:r>
                     </a:p>
                   </a:txBody>
@@ -4707,7 +4707,7 @@
                           </a:solidFill>
                           <a:latin typeface="Segoe UI"/>
                         </a:rPr>
-                        <a:t>14.0%</a:t>
+                        <a:t>13.2%</a:t>
                       </a:r>
                     </a:p>
                   </a:txBody>
@@ -4747,7 +4747,7 @@
                         <a:rPr sz="800">
                           <a:latin typeface="Segoe UI"/>
                         </a:rPr>
-                        <a:t>25.3%</a:t>
+                        <a:t>25.5%</a:t>
                       </a:r>
                     </a:p>
                   </a:txBody>
@@ -4866,7 +4866,7 @@
                         <a:rPr sz="800">
                           <a:latin typeface="Segoe UI"/>
                         </a:rPr>
-                        <a:t>35</a:t>
+                        <a:t>33</a:t>
                       </a:r>
                     </a:p>
                   </a:txBody>
@@ -4943,7 +4943,7 @@
                         <a:rPr sz="800">
                           <a:latin typeface="Segoe UI"/>
                         </a:rPr>
-                        <a:t>31</a:t>
+                        <a:t>32</a:t>
                       </a:r>
                     </a:p>
                   </a:txBody>

--- a/generated/Tier 1 Broker Scorecards/Specialty Coverage Insurance Agency, LLC_Broker_Scorecard.pptx
+++ b/generated/Tier 1 Broker Scorecards/Specialty Coverage Insurance Agency, LLC_Broker_Scorecard.pptx
@@ -3357,7 +3357,7 @@
                         <a:rPr sz="800">
                           <a:latin typeface="Segoe UI"/>
                         </a:rPr>
-                        <a:t>$3,498,766.90 / $3,317,657.13 / $1,082,204.21</a:t>
+                        <a:t>$3,498,766.90 / $3,336,403.16 / $1,100,950.24</a:t>
                       </a:r>
                     </a:p>
                   </a:txBody>
@@ -3394,7 +3394,7 @@
                         <a:rPr sz="900">
                           <a:latin typeface="Segoe UI"/>
                         </a:rPr>
-                        <a:t>Tier 1  |  10.72% / 15.00%</a:t>
+                        <a:t>Tier 1  |  10.46% / 15.00%</a:t>
                       </a:r>
                     </a:p>
                   </a:txBody>
@@ -3431,7 +3431,7 @@
                         <a:rPr sz="900">
                           <a:latin typeface="Segoe UI"/>
                         </a:rPr>
-                        <a:t>$4,898,273.66  (22.1% achieved)</a:t>
+                        <a:t>$4,898,273.66  (22.5% achieved)</a:t>
                       </a:r>
                     </a:p>
                   </a:txBody>
@@ -3690,7 +3690,7 @@
                         <a:rPr sz="900">
                           <a:latin typeface="Segoe UI"/>
                         </a:rPr>
-                        <a:t>Fleet Bound Premium: $75,386.13</a:t>
+                        <a:t>Fleet Bound Premium: $77,736.97</a:t>
                       </a:r>
                     </a:p>
                   </a:txBody>
@@ -3727,7 +3727,7 @@
                         <a:rPr sz="900">
                           <a:latin typeface="Segoe UI"/>
                         </a:rPr>
-                        <a:t>Fleet Book %: 7.0%</a:t>
+                        <a:t>Fleet Book %: 7.1%</a:t>
                       </a:r>
                     </a:p>
                   </a:txBody>
@@ -3766,7 +3766,7 @@
                         <a:rPr sz="900">
                           <a:latin typeface="Segoe UI"/>
                         </a:rPr>
-                        <a:t>Non-Fleet Subs: 524  |  Binds: 57</a:t>
+                        <a:t>Non-Fleet Subs: 528  |  Binds: 56</a:t>
                       </a:r>
                     </a:p>
                   </a:txBody>
@@ -3803,7 +3803,7 @@
                         <a:rPr sz="900">
                           <a:latin typeface="Segoe UI"/>
                         </a:rPr>
-                        <a:t>Non-Fleet Bound Premium: $1,006,818.08</a:t>
+                        <a:t>Non-Fleet Bound Premium: $1,023,213.27</a:t>
                       </a:r>
                     </a:p>
                   </a:txBody>
@@ -3840,7 +3840,7 @@
                         <a:rPr sz="900">
                           <a:latin typeface="Segoe UI"/>
                         </a:rPr>
-                        <a:t>Non-Fleet Book %: 93.0%</a:t>
+                        <a:t>Non-Fleet Book %: 92.9%</a:t>
                       </a:r>
                     </a:p>
                   </a:txBody>
@@ -4428,7 +4428,7 @@
                           </a:solidFill>
                           <a:latin typeface="Segoe UI"/>
                         </a:rPr>
-                        <a:t>136</a:t>
+                        <a:t>140</a:t>
                       </a:r>
                     </a:p>
                   </a:txBody>
@@ -4707,7 +4707,7 @@
                           </a:solidFill>
                           <a:latin typeface="Segoe UI"/>
                         </a:rPr>
-                        <a:t>13.2%</a:t>
+                        <a:t>12.9%</a:t>
                       </a:r>
                     </a:p>
                   </a:txBody>
@@ -4747,7 +4747,7 @@
                         <a:rPr sz="800">
                           <a:latin typeface="Segoe UI"/>
                         </a:rPr>
-                        <a:t>25.5%</a:t>
+                        <a:t>26.2%</a:t>
                       </a:r>
                     </a:p>
                   </a:txBody>
@@ -5020,7 +5020,7 @@
                         <a:rPr sz="800">
                           <a:latin typeface="Segoe UI"/>
                         </a:rPr>
-                        <a:t>38</a:t>
+                        <a:t>39</a:t>
                       </a:r>
                     </a:p>
                   </a:txBody>
@@ -5262,7 +5262,7 @@
                           </a:solidFill>
                           <a:latin typeface="Segoe UI"/>
                         </a:rPr>
-                        <a:t>$157.5K</a:t>
+                        <a:t>$176.3K</a:t>
                       </a:r>
                     </a:p>
                   </a:txBody>

--- a/generated/Tier 1 Broker Scorecards/Specialty Coverage Insurance Agency, LLC_Broker_Scorecard.pptx
+++ b/generated/Tier 1 Broker Scorecards/Specialty Coverage Insurance Agency, LLC_Broker_Scorecard.pptx
@@ -3394,7 +3394,7 @@
                         <a:rPr sz="900">
                           <a:latin typeface="Segoe UI"/>
                         </a:rPr>
-                        <a:t>Tier 1  |  10.46% / 15.00%</a:t>
+                        <a:t>Tier 1  |  10.34% / 15.00%</a:t>
                       </a:r>
                     </a:p>
                   </a:txBody>
@@ -3653,7 +3653,7 @@
                         <a:rPr sz="900">
                           <a:latin typeface="Segoe UI"/>
                         </a:rPr>
-                        <a:t>Fleet Subs: 17  |  Binds: 1</a:t>
+                        <a:t>Fleet Subs: 18  |  Binds: 1</a:t>
                       </a:r>
                     </a:p>
                   </a:txBody>
@@ -3766,7 +3766,7 @@
                         <a:rPr sz="900">
                           <a:latin typeface="Segoe UI"/>
                         </a:rPr>
-                        <a:t>Non-Fleet Subs: 528  |  Binds: 56</a:t>
+                        <a:t>Non-Fleet Subs: 533  |  Binds: 56</a:t>
                       </a:r>
                     </a:p>
                   </a:txBody>
@@ -4311,7 +4311,7 @@
                         <a:rPr sz="800">
                           <a:latin typeface="Segoe UI"/>
                         </a:rPr>
-                        <a:t>139</a:t>
+                        <a:t>140</a:t>
                       </a:r>
                     </a:p>
                   </a:txBody>
@@ -4428,7 +4428,7 @@
                           </a:solidFill>
                           <a:latin typeface="Segoe UI"/>
                         </a:rPr>
-                        <a:t>140</a:t>
+                        <a:t>146</a:t>
                       </a:r>
                     </a:p>
                   </a:txBody>
@@ -4581,7 +4581,7 @@
                         <a:rPr sz="800">
                           <a:latin typeface="Segoe UI"/>
                         </a:rPr>
-                        <a:t>23.7%</a:t>
+                        <a:t>24.3%</a:t>
                       </a:r>
                     </a:p>
                   </a:txBody>
@@ -4707,7 +4707,7 @@
                           </a:solidFill>
                           <a:latin typeface="Segoe UI"/>
                         </a:rPr>
-                        <a:t>12.9%</a:t>
+                        <a:t>12.3%</a:t>
                       </a:r>
                     </a:p>
                   </a:txBody>
@@ -4866,7 +4866,7 @@
                         <a:rPr sz="800">
                           <a:latin typeface="Segoe UI"/>
                         </a:rPr>
-                        <a:t>33</a:t>
+                        <a:t>34</a:t>
                       </a:r>
                     </a:p>
                   </a:txBody>

--- a/generated/Tier 1 Broker Scorecards/Specialty Coverage Insurance Agency, LLC_Broker_Scorecard.pptx
+++ b/generated/Tier 1 Broker Scorecards/Specialty Coverage Insurance Agency, LLC_Broker_Scorecard.pptx
@@ -3394,7 +3394,7 @@
                         <a:rPr sz="900">
                           <a:latin typeface="Segoe UI"/>
                         </a:rPr>
-                        <a:t>Tier 1  |  10.34% / 15.00%</a:t>
+                        <a:t>Tier 1  |  10.31% / 15.00%</a:t>
                       </a:r>
                     </a:p>
                   </a:txBody>
@@ -3766,7 +3766,7 @@
                         <a:rPr sz="900">
                           <a:latin typeface="Segoe UI"/>
                         </a:rPr>
-                        <a:t>Non-Fleet Subs: 533  |  Binds: 56</a:t>
+                        <a:t>Non-Fleet Subs: 535  |  Binds: 56</a:t>
                       </a:r>
                     </a:p>
                   </a:txBody>
@@ -4311,7 +4311,7 @@
                         <a:rPr sz="800">
                           <a:latin typeface="Segoe UI"/>
                         </a:rPr>
-                        <a:t>140</a:t>
+                        <a:t>139</a:t>
                       </a:r>
                     </a:p>
                   </a:txBody>
@@ -4428,7 +4428,7 @@
                           </a:solidFill>
                           <a:latin typeface="Segoe UI"/>
                         </a:rPr>
-                        <a:t>146</a:t>
+                        <a:t>148</a:t>
                       </a:r>
                     </a:p>
                   </a:txBody>
@@ -4581,7 +4581,7 @@
                         <a:rPr sz="800">
                           <a:latin typeface="Segoe UI"/>
                         </a:rPr>
-                        <a:t>24.3%</a:t>
+                        <a:t>22.3%</a:t>
                       </a:r>
                     </a:p>
                   </a:txBody>
@@ -4664,7 +4664,7 @@
                         <a:rPr sz="800">
                           <a:latin typeface="Segoe UI"/>
                         </a:rPr>
-                        <a:t>29.9%</a:t>
+                        <a:t>30.8%</a:t>
                       </a:r>
                     </a:p>
                   </a:txBody>
@@ -4707,7 +4707,7 @@
                           </a:solidFill>
                           <a:latin typeface="Segoe UI"/>
                         </a:rPr>
-                        <a:t>12.3%</a:t>
+                        <a:t>12.2%</a:t>
                       </a:r>
                     </a:p>
                   </a:txBody>
@@ -4866,7 +4866,7 @@
                         <a:rPr sz="800">
                           <a:latin typeface="Segoe UI"/>
                         </a:rPr>
-                        <a:t>34</a:t>
+                        <a:t>31</a:t>
                       </a:r>
                     </a:p>
                   </a:txBody>
@@ -4943,7 +4943,7 @@
                         <a:rPr sz="800">
                           <a:latin typeface="Segoe UI"/>
                         </a:rPr>
-                        <a:t>32</a:t>
+                        <a:t>33</a:t>
                       </a:r>
                     </a:p>
                   </a:txBody>

--- a/generated/Tier 1 Broker Scorecards/Specialty Coverage Insurance Agency, LLC_Broker_Scorecard.pptx
+++ b/generated/Tier 1 Broker Scorecards/Specialty Coverage Insurance Agency, LLC_Broker_Scorecard.pptx
@@ -3357,7 +3357,7 @@
                         <a:rPr sz="800">
                           <a:latin typeface="Segoe UI"/>
                         </a:rPr>
-                        <a:t>$3,498,766.90 / $3,336,403.16 / $1,100,950.24</a:t>
+                        <a:t>$3,498,766.90 / $3,024,812.01 / $1,100,950.24</a:t>
                       </a:r>
                     </a:p>
                   </a:txBody>
@@ -4465,7 +4465,7 @@
                         <a:rPr sz="800">
                           <a:latin typeface="Segoe UI"/>
                         </a:rPr>
-                        <a:t>149</a:t>
+                        <a:t>150</a:t>
                       </a:r>
                     </a:p>
                   </a:txBody>
@@ -4581,7 +4581,7 @@
                         <a:rPr sz="800">
                           <a:latin typeface="Segoe UI"/>
                         </a:rPr>
-                        <a:t>22.3%</a:t>
+                        <a:t>23.0%</a:t>
                       </a:r>
                     </a:p>
                   </a:txBody>
@@ -4664,7 +4664,7 @@
                         <a:rPr sz="800">
                           <a:latin typeface="Segoe UI"/>
                         </a:rPr>
-                        <a:t>30.8%</a:t>
+                        <a:t>29.9%</a:t>
                       </a:r>
                     </a:p>
                   </a:txBody>
@@ -4747,7 +4747,7 @@
                         <a:rPr sz="800">
                           <a:latin typeface="Segoe UI"/>
                         </a:rPr>
-                        <a:t>26.2%</a:t>
+                        <a:t>24.7%</a:t>
                       </a:r>
                     </a:p>
                   </a:txBody>
@@ -4866,7 +4866,7 @@
                         <a:rPr sz="800">
                           <a:latin typeface="Segoe UI"/>
                         </a:rPr>
-                        <a:t>31</a:t>
+                        <a:t>32</a:t>
                       </a:r>
                     </a:p>
                   </a:txBody>
@@ -4943,7 +4943,7 @@
                         <a:rPr sz="800">
                           <a:latin typeface="Segoe UI"/>
                         </a:rPr>
-                        <a:t>33</a:t>
+                        <a:t>32</a:t>
                       </a:r>
                     </a:p>
                   </a:txBody>
@@ -5020,7 +5020,7 @@
                         <a:rPr sz="800">
                           <a:latin typeface="Segoe UI"/>
                         </a:rPr>
-                        <a:t>39</a:t>
+                        <a:t>37</a:t>
                       </a:r>
                     </a:p>
                   </a:txBody>
